--- a/decks/Microsoft Foundry Prompt Caching.pptx
+++ b/decks/Microsoft Foundry Prompt Caching.pptx
@@ -2374,7 +2374,7 @@
           </a:lstStyle>
           <a:p>
             <a:fld id="{090D1257-65BD-4E6F-8B07-C1EECB89DBB0}" type="datetimeFigureOut">
-              <a:t>9/25/2026</a:t>
+              <a:t>11/10/2026</a:t>
             </a:fld>
             <a:endParaRPr lang="en-US"/>
           </a:p>
@@ -3335,7 +3335,7 @@
           <a:p>
             <a:fld id="{5BCAD085-E8A6-8845-BD4E-CB4CCA059FC4}" type="datetimeFigureOut">
               <a:rPr lang="en-US" smtClean="0"/>
-              <a:t>9/25/2026</a:t>
+              <a:t>10/11/2026</a:t>
             </a:fld>
             <a:endParaRPr lang="en-US"/>
           </a:p>
@@ -3503,7 +3503,7 @@
           <a:p>
             <a:fld id="{5BCAD085-E8A6-8845-BD4E-CB4CCA059FC4}" type="datetimeFigureOut">
               <a:rPr lang="en-US" smtClean="0"/>
-              <a:t>9/25/2026</a:t>
+              <a:t>10/11/2026</a:t>
             </a:fld>
             <a:endParaRPr lang="en-US"/>
           </a:p>
@@ -3681,7 +3681,7 @@
           <a:p>
             <a:fld id="{5BCAD085-E8A6-8845-BD4E-CB4CCA059FC4}" type="datetimeFigureOut">
               <a:rPr lang="en-US" smtClean="0"/>
-              <a:t>9/25/2026</a:t>
+              <a:t>10/11/2026</a:t>
             </a:fld>
             <a:endParaRPr lang="en-US"/>
           </a:p>
@@ -3849,7 +3849,7 @@
           <a:p>
             <a:fld id="{5BCAD085-E8A6-8845-BD4E-CB4CCA059FC4}" type="datetimeFigureOut">
               <a:rPr lang="en-US" smtClean="0"/>
-              <a:t>9/25/2026</a:t>
+              <a:t>10/11/2026</a:t>
             </a:fld>
             <a:endParaRPr lang="en-US"/>
           </a:p>
@@ -4094,7 +4094,7 @@
           <a:p>
             <a:fld id="{5BCAD085-E8A6-8845-BD4E-CB4CCA059FC4}" type="datetimeFigureOut">
               <a:rPr lang="en-US" smtClean="0"/>
-              <a:t>9/25/2026</a:t>
+              <a:t>10/11/2026</a:t>
             </a:fld>
             <a:endParaRPr lang="en-US"/>
           </a:p>
@@ -4379,7 +4379,7 @@
           <a:p>
             <a:fld id="{5BCAD085-E8A6-8845-BD4E-CB4CCA059FC4}" type="datetimeFigureOut">
               <a:rPr lang="en-US" smtClean="0"/>
-              <a:t>9/25/2026</a:t>
+              <a:t>10/11/2026</a:t>
             </a:fld>
             <a:endParaRPr lang="en-US"/>
           </a:p>
@@ -4798,7 +4798,7 @@
           <a:p>
             <a:fld id="{5BCAD085-E8A6-8845-BD4E-CB4CCA059FC4}" type="datetimeFigureOut">
               <a:rPr lang="en-US" smtClean="0"/>
-              <a:t>9/25/2026</a:t>
+              <a:t>10/11/2026</a:t>
             </a:fld>
             <a:endParaRPr lang="en-US"/>
           </a:p>
@@ -4915,7 +4915,7 @@
           <a:p>
             <a:fld id="{5BCAD085-E8A6-8845-BD4E-CB4CCA059FC4}" type="datetimeFigureOut">
               <a:rPr lang="en-US" smtClean="0"/>
-              <a:t>9/25/2026</a:t>
+              <a:t>10/11/2026</a:t>
             </a:fld>
             <a:endParaRPr lang="en-US"/>
           </a:p>
@@ -5010,7 +5010,7 @@
           <a:p>
             <a:fld id="{5BCAD085-E8A6-8845-BD4E-CB4CCA059FC4}" type="datetimeFigureOut">
               <a:rPr lang="en-US" smtClean="0"/>
-              <a:t>9/25/2026</a:t>
+              <a:t>10/11/2026</a:t>
             </a:fld>
             <a:endParaRPr lang="en-US"/>
           </a:p>
@@ -5285,7 +5285,7 @@
           <a:p>
             <a:fld id="{5BCAD085-E8A6-8845-BD4E-CB4CCA059FC4}" type="datetimeFigureOut">
               <a:rPr lang="en-US" smtClean="0"/>
-              <a:t>9/25/2026</a:t>
+              <a:t>10/11/2026</a:t>
             </a:fld>
             <a:endParaRPr lang="en-US"/>
           </a:p>
@@ -5537,7 +5537,7 @@
           <a:p>
             <a:fld id="{5BCAD085-E8A6-8845-BD4E-CB4CCA059FC4}" type="datetimeFigureOut">
               <a:rPr lang="en-US" smtClean="0"/>
-              <a:t>9/25/2026</a:t>
+              <a:t>10/11/2026</a:t>
             </a:fld>
             <a:endParaRPr lang="en-US"/>
           </a:p>
@@ -5748,7 +5748,7 @@
           <a:p>
             <a:fld id="{5BCAD085-E8A6-8845-BD4E-CB4CCA059FC4}" type="datetimeFigureOut">
               <a:rPr lang="en-US" smtClean="0"/>
-              <a:t>9/25/2026</a:t>
+              <a:t>10/11/2026</a:t>
             </a:fld>
             <a:endParaRPr lang="en-US"/>
           </a:p>
@@ -7124,7 +7124,17 @@
                 <a:effectLst/>
                 <a:latin typeface="Segoe UI" panose="020B0502040204020203" pitchFamily="34" charset="0"/>
               </a:rPr>
-              <a:t>Alex Sachelarescu · Cloud Solution Architect · September 2026</a:t>
+              <a:t>September </a:t>
+            </a:r>
+            <a:r>
+              <a:rPr lang="en-US" sz="1150" dirty="0">
+                <a:solidFill>
+                  <a:srgbClr val="9AA3B8"/>
+                </a:solidFill>
+                <a:effectLst/>
+                <a:latin typeface="Segoe UI" panose="020B0502040204020203" pitchFamily="34" charset="0"/>
+              </a:rPr>
+              <a:t>2026</a:t>
             </a:r>
           </a:p>
           <a:p>
@@ -7132,12 +7142,12 @@
               <a:buNone/>
             </a:pPr>
             <a:r>
-              <a:rPr lang="en-US" sz="100">
+              <a:rPr lang="en-US" sz="100" dirty="0">
                 <a:effectLst/>
               </a:rPr>
               <a:t> </a:t>
             </a:r>
-            <a:endParaRPr lang="en-US"/>
+            <a:endParaRPr lang="en-US" dirty="0"/>
           </a:p>
         </p:txBody>
       </p:sp>
@@ -36041,6 +36051,6 @@
 
 <file path=docMetadata/LabelInfo.xml><?xml version="1.0" encoding="utf-8"?>
 <clbl:labelList xmlns:clbl="http://schemas.microsoft.com/office/2020/mipLabelMetadata">
-  <clbl:label id="{f42aa342-8706-4288-bd11-ebb85995028c}" enabled="1" method="Standard" siteId="{72f988bf-86f1-41af-91ab-2d7cd011db47}" removed="0"/>
+  <clbl:label id="{87867195-f2b8-4ac2-b0b6-6bb73cb33afc}" enabled="1" method="Privileged" siteId="{72f988bf-86f1-41af-91ab-2d7cd011db47}" contentBits="0" removed="0"/>
 </clbl:labelList>
 </file>